--- a/assets/powerpoints/module-travail/C3-quel-quelle-quels-quelles.pptx
+++ b/assets/powerpoints/module-travail/C3-quel-quelle-quels-quelles.pptx
@@ -4720,7 +4720,7 @@
                 </a:solidFill>
                 <a:latin typeface="Verdana"/>
               </a:rPr>
-              <a:t>SÉANCE C3  ·  MODULE 3</a:t>
+              <a:t>SÉANCE C3  ·  MODULE 4</a:t>
             </a:r>
           </a:p>
         </p:txBody>

--- a/assets/powerpoints/module-travail/C3-quel-quelle-quels-quelles.pptx
+++ b/assets/powerpoints/module-travail/C3-quel-quelle-quels-quelles.pptx
@@ -14004,7 +14004,7 @@
                 </a:solidFill>
                 <a:latin typeface="Verdana"/>
               </a:rPr>
-              <a:t>EN APPRENDRE PLUS</a:t>
+              <a:t>OUVRIR LA MINI-LEÇON</a:t>
             </a:r>
           </a:p>
         </p:txBody>
